--- a/FA24-BEDS-079.pptx
+++ b/FA24-BEDS-079.pptx
@@ -2117,7 +2117,7 @@
                 <a:ea typeface="Calibri" pitchFamily="34" charset="-122"/>
                 <a:cs typeface="Calibri" pitchFamily="34" charset="-120"/>
               </a:rPr>
-              <a:t>Most important finding: earnings climb to the late 20s, then plateau</a:t>
+              <a:t>Most important finding: earnings climb to the late 20s, then climb slowly</a:t>
             </a:r>
             <a:endParaRPr lang="en-US" sz="2800" dirty="0"/>
           </a:p>
